--- a/library/lectures/lec-02/rendered/lec-02-en.pptx
+++ b/library/lectures/lec-02/rendered/lec-02-en.pptx
@@ -1611,6 +1611,11 @@
               <a:t>And the key point — what this weight distribution concretely affects, not just "something gets weighted somewhere." The weight of each connection determines what fraction of the corresponding token's Value vector ends up in the updated representation of the current position: if "it" assigns 0.7 of its weight to "cat," then the content of "cat" — its Value — dominates the updated representation of the token "it." And the current token's representation is exactly what the probability distribution for the next prediction is built from at the next step. In other words: the attention weight distribution directly and mechanically determines what the next predicted token will be — this is not a side effect, it's a direct causal chain.</a:t>
             </a:r>
           </a:p>
+          <a:p>
+            <a:r>
+              <a:t>An important addendum for 2025-2026: N×N is an exact description of one dense-attention layer, and it remains the baseline for understanding the mechanism. But in real production models of 2025-2026, not every layer is dense: Qwen3-Next and Kimi Linear keep dense attention in only about 25% of layers, with the rest running linear (O(N)) attention; the resulting asymptotics for the whole model is no longer purely quadratic, but it doesn't become fully linear either, as long as at least some layers stay dense — a trade-off, not an elimination of the problem.</a:t>
+            </a:r>
+          </a:p>
         </p:txBody>
       </p:sp>
       <p:sp>
@@ -2018,7 +2023,7 @@
           </a:p>
           <a:p>
             <a:r>
-              <a:t>Why is the window finite, and why can't you "just increase it"? The first reason is familiar: the quadratic cost of attention plus a linearly growing cache. The second is subtler: token position is encoded in the model's geometry in a way trained on specific lengths, and naively stretching it breaks the mechanism; extension methods — RoPE, YaRN — are covered in the coursebook for self-study: the chapter, part 2 — the section on positional encoding.</a:t>
+              <a:t>Why is the window finite, and why can't you "just increase it"? There are two separate reasons here, and they're worth keeping apart. The first is compute: even where some layers are already sparse or linear, the cost still grows faster than linearly on whatever dense layers remain. The second is memory: the KV-cache grows linearly with token count regardless of whether attention is dense or sparse — sparsity decides which part of the cache to access, not how much of it needs to be stored; that's handled separately by MLA, GQA, quantization, and sliding window. In concrete terms: at the ten million tokens Llama 4 Scout advertises, the KV-cache alone requires on the order of thirty-two terabytes of memory — a physical ceiling, not an algorithmic one. And a third reason, separate from compute and memory: token position is encoded in the model's geometry in a way trained on specific lengths, and naively stretching it breaks the mechanism; extension methods — RoPE, YaRN — are covered in the coursebook for self-study: the chapter, part 2 — the section on positional encoding.</a:t>
             </a:r>
           </a:p>
           <a:p>
@@ -22057,8 +22062,8 @@
         </p:nvSpPr>
         <p:spPr>
           <a:xfrm>
-            <a:off x="502920" y="5138928"/>
-            <a:ext cx="6858000" cy="731520"/>
+            <a:off x="502920" y="5102352"/>
+            <a:ext cx="6858000" cy="640080"/>
           </a:xfrm>
           <a:prstGeom prst="rect">
             <a:avLst/>
@@ -22073,11 +22078,11 @@
           <a:p>
             <a:pPr algn="l">
               <a:lnSpc>
-                <a:spcPct val="112000"/>
-              </a:lnSpc>
-            </a:pPr>
-            <a:r>
-              <a:rPr sz="1250" b="1" i="0">
+                <a:spcPct val="108000"/>
+              </a:lnSpc>
+            </a:pPr>
+            <a:r>
+              <a:rPr sz="1200" b="1" i="0">
                 <a:solidFill>
                   <a:srgbClr val="21295C"/>
                 </a:solidFill>
@@ -22086,7 +22091,7 @@
               <a:t>In the row for “it”: </a:t>
             </a:r>
             <a:r>
-              <a:rPr sz="1250" b="0" i="0">
+              <a:rPr sz="1200" b="0" i="0">
                 <a:solidFill>
                   <a:srgbClr val="21295C"/>
                 </a:solidFill>
@@ -22098,14 +22103,14 @@
           <a:p>
             <a:pPr algn="l">
               <a:lnSpc>
-                <a:spcPct val="112000"/>
+                <a:spcPct val="108000"/>
               </a:lnSpc>
               <a:spcBef>
-                <a:spcPts val="300"/>
+                <a:spcPts val="200"/>
               </a:spcBef>
             </a:pPr>
             <a:r>
-              <a:rPr sz="1150" b="0" i="1">
+              <a:rPr sz="1050" b="0" i="1">
                 <a:solidFill>
                   <a:srgbClr val="6B7685"/>
                 </a:solidFill>
@@ -22520,8 +22525,8 @@
         </p:nvSpPr>
         <p:spPr>
           <a:xfrm>
-            <a:off x="502920" y="5897880"/>
-            <a:ext cx="11201400" cy="640080"/>
+            <a:off x="502920" y="5760720"/>
+            <a:ext cx="11201400" cy="566928"/>
           </a:xfrm>
           <a:prstGeom prst="roundRect">
             <a:avLst>
@@ -22568,8 +22573,8 @@
         </p:nvSpPr>
         <p:spPr>
           <a:xfrm>
-            <a:off x="685800" y="5952744"/>
-            <a:ext cx="10835640" cy="530352"/>
+            <a:off x="685800" y="5815583"/>
+            <a:ext cx="10835640" cy="457200"/>
           </a:xfrm>
           <a:prstGeom prst="rect">
             <a:avLst/>
@@ -22588,13 +22593,52 @@
               </a:lnSpc>
             </a:pPr>
             <a:r>
-              <a:rPr sz="1450" b="1" i="0">
+              <a:rPr sz="1350" b="1" i="0">
                 <a:solidFill>
                   <a:srgbClr val="21295C"/>
                 </a:solidFill>
                 <a:latin typeface="Arial"/>
               </a:rPr>
               <a:t>What this affects: the weights determine whose Value ends up in the current token's representation — and directly shape the next prediction.</a:t>
+            </a:r>
+          </a:p>
+        </p:txBody>
+      </p:sp>
+      <p:sp>
+        <p:nvSpPr>
+          <p:cNvPr id="17" name="TextBox 16"/>
+          <p:cNvSpPr txBox="1"/>
+          <p:nvPr/>
+        </p:nvSpPr>
+        <p:spPr>
+          <a:xfrm>
+            <a:off x="502920" y="6400800"/>
+            <a:ext cx="11201400" cy="320040"/>
+          </a:xfrm>
+          <a:prstGeom prst="rect">
+            <a:avLst/>
+          </a:prstGeom>
+          <a:noFill/>
+        </p:spPr>
+        <p:txBody>
+          <a:bodyPr wrap="square" lIns="0" rIns="0" tIns="0" bIns="0" anchor="t">
+            <a:spAutoFit/>
+          </a:bodyPr>
+          <a:lstStyle/>
+          <a:p>
+            <a:pPr algn="ctr">
+              <a:lnSpc>
+                <a:spcPct val="110000"/>
+              </a:lnSpc>
+            </a:pPr>
+            <a:r>
+              <a:rPr sz="1050" b="0" i="1">
+                <a:solidFill>
+                  <a:srgbClr val="1C7293"/>
+                </a:solidFill>
+                <a:latin typeface="Arial"/>
+              </a:rPr>
+              <a:t>Production 2025-26: some models replace part of their layers with sparse/linear attention — this cuts compute, but the N×N rule remains the baseline and the price of full attention.</a:t>
             </a:r>
           </a:p>
         </p:txBody>
@@ -29241,8 +29285,8 @@
         </p:nvSpPr>
         <p:spPr>
           <a:xfrm>
-            <a:off x="502920" y="4754880"/>
-            <a:ext cx="11201400" cy="502920"/>
+            <a:off x="502920" y="4681728"/>
+            <a:ext cx="11201400" cy="658368"/>
           </a:xfrm>
           <a:prstGeom prst="rect">
             <a:avLst/>
@@ -29257,17 +29301,36 @@
           <a:p>
             <a:pPr algn="ctr">
               <a:lnSpc>
-                <a:spcPct val="115000"/>
-              </a:lnSpc>
-            </a:pPr>
-            <a:r>
-              <a:rPr sz="1200" b="0" i="1">
+                <a:spcPct val="112000"/>
+              </a:lnSpc>
+            </a:pPr>
+            <a:r>
+              <a:rPr sz="1150" b="0" i="1">
                 <a:solidFill>
                   <a:srgbClr val="1C7293"/>
                 </a:solidFill>
                 <a:latin typeface="Arial"/>
               </a:rPr>
               <a:t>You can't just “stretch” the window: token position is encoded by a geometry trained on specific lengths — extending it (RoPE / YaRN) is separate engineering work.</a:t>
+            </a:r>
+          </a:p>
+          <a:p>
+            <a:pPr algn="ctr">
+              <a:lnSpc>
+                <a:spcPct val="112000"/>
+              </a:lnSpc>
+              <a:spcBef>
+                <a:spcPts val="200"/>
+              </a:spcBef>
+            </a:pPr>
+            <a:r>
+              <a:rPr sz="1150" b="0" i="1">
+                <a:solidFill>
+                  <a:srgbClr val="1C7293"/>
+                </a:solidFill>
+                <a:latin typeface="Arial"/>
+              </a:rPr>
+              <a:t>A 10M claim ≈ 32TB of KV-cache — a physical ceiling.</a:t>
             </a:r>
           </a:p>
         </p:txBody>
@@ -29280,8 +29343,8 @@
         </p:nvSpPr>
         <p:spPr>
           <a:xfrm>
-            <a:off x="502920" y="5394960"/>
-            <a:ext cx="11201400" cy="621792"/>
+            <a:off x="502920" y="5413248"/>
+            <a:ext cx="11201400" cy="566928"/>
           </a:xfrm>
           <a:prstGeom prst="roundRect">
             <a:avLst>
@@ -29328,8 +29391,8 @@
         </p:nvSpPr>
         <p:spPr>
           <a:xfrm>
-            <a:off x="685800" y="5449824"/>
-            <a:ext cx="10835640" cy="512064"/>
+            <a:off x="685800" y="5468112"/>
+            <a:ext cx="10835640" cy="457200"/>
           </a:xfrm>
           <a:prstGeom prst="rect">
             <a:avLst/>
@@ -29348,7 +29411,7 @@
               </a:lnSpc>
             </a:pPr>
             <a:r>
-              <a:rPr sz="1350" b="1" i="0">
+              <a:rPr sz="1300" b="1" i="0">
                 <a:solidFill>
                   <a:srgbClr val="21295C"/>
                 </a:solidFill>
@@ -29367,7 +29430,7 @@
         </p:nvSpPr>
         <p:spPr>
           <a:xfrm>
-            <a:off x="502920" y="6062472"/>
+            <a:off x="502920" y="6053328"/>
             <a:ext cx="11201400" cy="502920"/>
           </a:xfrm>
           <a:prstGeom prst="rect">
